--- a/生成的课件/09_管理经济学_第09章_企业决策中的风险分析与信息不对称.pptx
+++ b/生成的课件/09_管理经济学_第09章_企业决策中的风险分析与信息不对称.pptx
@@ -4353,7 +4353,7 @@
                 <a:latin typeface="Times New Roman"/>
                 <a:ea typeface="宋体"/>
               </a:rPr>
-              <a:t>  1. 回避与预防减少风险</a:t>
+              <a:t>1. 回避与预防减少风险</a:t>
             </a:r>
           </a:p>
         </p:txBody>
@@ -4396,7 +4396,7 @@
                 <a:latin typeface="Times New Roman"/>
                 <a:ea typeface="宋体"/>
               </a:rPr>
-              <a:t>（1）回避风险（Avoidance）： </a:t>
+              <a:t>（1）回避风险（Avoidance）：</a:t>
             </a:r>
             <a:r>
               <a:rPr sz="1200" b="0">
@@ -4426,7 +4426,7 @@
                 <a:latin typeface="Times New Roman"/>
                 <a:ea typeface="宋体"/>
               </a:rPr>
-              <a:t>（2）减少风险（Reduction）： </a:t>
+              <a:t>（2）减少风险（Reduction）：</a:t>
             </a:r>
             <a:r>
               <a:rPr sz="1200" b="0">
@@ -4536,7 +4536,7 @@
                 <a:latin typeface="Times New Roman"/>
                 <a:ea typeface="宋体"/>
               </a:rPr>
-              <a:t>  2. 自主承担与组合分散</a:t>
+              <a:t>2. 自主承担与组合分散</a:t>
             </a:r>
           </a:p>
         </p:txBody>
@@ -4579,7 +4579,7 @@
                 <a:latin typeface="Times New Roman"/>
                 <a:ea typeface="宋体"/>
               </a:rPr>
-              <a:t>（3）承担风险（Retention）： </a:t>
+              <a:t>（3）承担风险（Retention）：</a:t>
             </a:r>
             <a:r>
               <a:rPr sz="1200" b="0">
@@ -4609,7 +4609,7 @@
                 <a:latin typeface="Times New Roman"/>
                 <a:ea typeface="宋体"/>
               </a:rPr>
-              <a:t>（4）分散风险（Diversification）： </a:t>
+              <a:t>（4）分散风险（Diversification）：</a:t>
             </a:r>
             <a:r>
               <a:rPr sz="1200" b="0">
@@ -4719,7 +4719,7 @@
                 <a:latin typeface="Times New Roman"/>
                 <a:ea typeface="宋体"/>
               </a:rPr>
-              <a:t>  3. 金融对冲与契约转移</a:t>
+              <a:t>3. 金融对冲与契约转移</a:t>
             </a:r>
           </a:p>
         </p:txBody>
@@ -4762,7 +4762,7 @@
                 <a:latin typeface="Times New Roman"/>
                 <a:ea typeface="宋体"/>
               </a:rPr>
-              <a:t>（5）转移风险（Transfer）： </a:t>
+              <a:t>（5）转移风险（Transfer）：</a:t>
             </a:r>
             <a:r>
               <a:rPr sz="1200" b="0">
@@ -4829,7 +4829,7 @@
                 <a:latin typeface="Times New Roman"/>
                 <a:ea typeface="宋体"/>
               </a:rPr>
-              <a:t>  ★ 核心要点：五大降险工具构成了现代企业全面风险管理（ERM）的立体防御护城河体系。</a:t>
+              <a:t>★ 核心要点：五大降险工具构成了现代企业全面风险管理（ERM）的立体防御护城河体系。</a:t>
             </a:r>
           </a:p>
         </p:txBody>
@@ -5236,7 +5236,7 @@
                 <a:latin typeface="Times New Roman"/>
                 <a:ea typeface="宋体"/>
               </a:rPr>
-              <a:t>  1. 买入套期保值（Long Hedge）对冲锁价机制</a:t>
+              <a:t>1. 买入套期保值（Long Hedge）对冲锁价机制</a:t>
             </a:r>
           </a:p>
         </p:txBody>
@@ -5279,7 +5279,7 @@
                 <a:latin typeface="Times New Roman"/>
                 <a:ea typeface="宋体"/>
               </a:rPr>
-              <a:t>（1）适用主体： </a:t>
+              <a:t>（1）适用主体：</a:t>
             </a:r>
             <a:r>
               <a:rPr sz="1250" b="0">
@@ -5309,7 +5309,7 @@
                 <a:latin typeface="Times New Roman"/>
                 <a:ea typeface="宋体"/>
               </a:rPr>
-              <a:t>（2）对冲操作： </a:t>
+              <a:t>（2）对冲操作：</a:t>
             </a:r>
             <a:r>
               <a:rPr sz="1250" b="0">
@@ -5339,7 +5339,7 @@
                 <a:latin typeface="Times New Roman"/>
                 <a:ea typeface="宋体"/>
               </a:rPr>
-              <a:t>（3）对冲效果： </a:t>
+              <a:t>（3）对冲效果：</a:t>
             </a:r>
             <a:r>
               <a:rPr sz="1250" b="0">
@@ -5449,7 +5449,7 @@
                 <a:latin typeface="Times New Roman"/>
                 <a:ea typeface="宋体"/>
               </a:rPr>
-              <a:t>  2. 案例9-2：航空公司航油套保的经验与教训</a:t>
+              <a:t>2. 案例9-2：航空公司航油套保的经验与教训</a:t>
             </a:r>
           </a:p>
         </p:txBody>
@@ -5492,7 +5492,7 @@
                 <a:latin typeface="Times New Roman"/>
                 <a:ea typeface="宋体"/>
               </a:rPr>
-              <a:t>（1）成功经验： </a:t>
+              <a:t>（1）成功经验：</a:t>
             </a:r>
             <a:r>
               <a:rPr sz="1250" b="0">
@@ -5522,7 +5522,7 @@
                 <a:latin typeface="Times New Roman"/>
                 <a:ea typeface="宋体"/>
               </a:rPr>
-              <a:t>（2）失败警示（东航国航结构化衍生品）： </a:t>
+              <a:t>（2）失败警示（东航国航结构化衍生品）：</a:t>
             </a:r>
             <a:r>
               <a:rPr sz="1250" b="0">
@@ -5589,7 +5589,7 @@
                 <a:latin typeface="Times New Roman"/>
                 <a:ea typeface="宋体"/>
               </a:rPr>
-              <a:t>  ★ 核心要点：金融套期保值是企业平抑大宗原材料价格剧烈波动的防弹衣，严禁将套保异化为单边金融投机。</a:t>
+              <a:t>★ 核心要点：金融套期保值是企业平抑大宗原材料价格剧烈波动的防弹衣，严禁将套保异化为单边金融投机。</a:t>
             </a:r>
           </a:p>
         </p:txBody>
@@ -6303,7 +6303,7 @@
                 <a:latin typeface="Times New Roman"/>
                 <a:ea typeface="宋体"/>
               </a:rPr>
-              <a:t>  1. 风险调整贴现率法（RADR）基本原理</a:t>
+              <a:t>1. 风险调整贴现率法（RADR）基本原理</a:t>
             </a:r>
           </a:p>
         </p:txBody>
@@ -6346,7 +6346,7 @@
                 <a:latin typeface="Times New Roman"/>
                 <a:ea typeface="宋体"/>
               </a:rPr>
-              <a:t>（1）模型核心理念： </a:t>
+              <a:t>（1）模型核心理念：</a:t>
             </a:r>
             <a:r>
               <a:rPr sz="1250" b="0">
@@ -6376,7 +6376,7 @@
                 <a:latin typeface="Times New Roman"/>
                 <a:ea typeface="宋体"/>
               </a:rPr>
-              <a:t>（2）贴现率风险拆解： </a:t>
+              <a:t>（2）贴现率风险拆解：</a:t>
             </a:r>
             <a:r>
               <a:rPr sz="1250" b="0">
@@ -6386,7 +6386,7 @@
                 <a:latin typeface="Times New Roman"/>
                 <a:ea typeface="宋体"/>
               </a:rPr>
-              <a:t>k = R_f + b \cdot CV \quad (R_f: 无风险收益率, b: 风险报酬斜率系数, CV: 离散系数)</a:t>
+              <a:t>k = Rf + b · CV (Rf: 无风险收益率, b: 风险报酬斜率系数, CV: 离散系数)</a:t>
             </a:r>
           </a:p>
           <a:p>
@@ -6406,7 +6406,7 @@
                 <a:latin typeface="Times New Roman"/>
                 <a:ea typeface="宋体"/>
               </a:rPr>
-              <a:t>（3）风险净现值公式： </a:t>
+              <a:t>（3）风险净现值公式：</a:t>
             </a:r>
             <a:r>
               <a:rPr sz="1250" b="0">
@@ -6416,7 +6416,7 @@
                 <a:latin typeface="Times New Roman"/>
                 <a:ea typeface="宋体"/>
               </a:rPr>
-              <a:t>NPV = \sum_{t=1}^n \frac{NCF_t}{(1 + k)^t} - C_0</a:t>
+              <a:t>NPV = ∑ⁿ (NCFₜ) / ((1 + k)ᵗ) - C₀</a:t>
             </a:r>
           </a:p>
         </p:txBody>
@@ -6516,7 +6516,7 @@
                 <a:latin typeface="Times New Roman"/>
                 <a:ea typeface="宋体"/>
               </a:rPr>
-              <a:t>  2. 肯定当量系数法（Certainty Equivalent Method）对比</a:t>
+              <a:t>2. 肯定当量系数法（Certainty Equivalent Method）对比</a:t>
             </a:r>
           </a:p>
         </p:txBody>
@@ -6559,7 +6559,7 @@
                 <a:latin typeface="Times New Roman"/>
                 <a:ea typeface="宋体"/>
               </a:rPr>
-              <a:t>（1）调整分子现金流： </a:t>
+              <a:t>（1）调整分子现金流：</a:t>
             </a:r>
             <a:r>
               <a:rPr sz="1250" b="0">
@@ -6569,7 +6569,7 @@
                 <a:latin typeface="Times New Roman"/>
                 <a:ea typeface="宋体"/>
               </a:rPr>
-              <a:t>将未来不确定的风险现金流乘以肯定当量系数 \alpha_t (0 &lt; \alpha_t \le 1)，转化为完全确定的等价值现金流。</a:t>
+              <a:t>将未来不确定的风险现金流乘以肯定当量系数 αₜ (0 &lt; αₜ ≤ 1)，转化为完全确定的等价值现金流。</a:t>
             </a:r>
           </a:p>
           <a:p>
@@ -6589,7 +6589,7 @@
                 <a:latin typeface="Times New Roman"/>
                 <a:ea typeface="宋体"/>
               </a:rPr>
-              <a:t>（2）公式： </a:t>
+              <a:t>（2）公式：</a:t>
             </a:r>
             <a:r>
               <a:rPr sz="1250" b="0">
@@ -6599,7 +6599,7 @@
                 <a:latin typeface="Times New Roman"/>
                 <a:ea typeface="宋体"/>
               </a:rPr>
-              <a:t>NPV = \sum_{t=1}^n \frac{\alpha_t NCF_t}{(1 + R_f)^t} - C_0 \quad (直接采用无风险收益率 R_f 折现！)</a:t>
+              <a:t>NPV = ∑ⁿ (αₜ NCFₜ) / ((1 + Rf)ᵗ) - C₀ (直接采用无风险收益率 Rf 折现！)</a:t>
             </a:r>
           </a:p>
         </p:txBody>
@@ -6656,7 +6656,7 @@
                 <a:latin typeface="Times New Roman"/>
                 <a:ea typeface="宋体"/>
               </a:rPr>
-              <a:t>  ★ 核心要点：RADR 法操作简便且与现代资本资产定价 CAPM 体系无缝衔接，是企业投资项目风险折现的行业标准。</a:t>
+              <a:t>★ 核心要点：RADR 法操作简便且与现代资本资产定价 CAPM 体系无缝衔接，是企业投资项目风险折现的行业标准。</a:t>
             </a:r>
           </a:p>
         </p:txBody>
@@ -7063,7 +7063,7 @@
                 <a:latin typeface="Times New Roman"/>
                 <a:ea typeface="宋体"/>
               </a:rPr>
-              <a:t>  1. 决策树四大构成要素</a:t>
+              <a:t>1. 决策树四大构成要素</a:t>
             </a:r>
           </a:p>
         </p:txBody>
@@ -7106,7 +7106,7 @@
                 <a:latin typeface="Times New Roman"/>
                 <a:ea typeface="宋体"/>
               </a:rPr>
-              <a:t>（1）决策节点（□ 方框）： </a:t>
+              <a:t>（1）决策节点（□ 方框）：</a:t>
             </a:r>
             <a:r>
               <a:rPr sz="1250" b="0">
@@ -7136,7 +7136,7 @@
                 <a:latin typeface="Times New Roman"/>
                 <a:ea typeface="宋体"/>
               </a:rPr>
-              <a:t>（2）状态机会节点（○ 圆圈）： </a:t>
+              <a:t>（2）状态机会节点（○ 圆圈）：</a:t>
             </a:r>
             <a:r>
               <a:rPr sz="1250" b="0">
@@ -7166,7 +7166,7 @@
                 <a:latin typeface="Times New Roman"/>
                 <a:ea typeface="宋体"/>
               </a:rPr>
-              <a:t>（3）方案枝与概率枝（分支线）： </a:t>
+              <a:t>（3）方案枝与概率枝（分支线）：</a:t>
             </a:r>
             <a:r>
               <a:rPr sz="1250" b="0">
@@ -7196,7 +7196,7 @@
                 <a:latin typeface="Times New Roman"/>
                 <a:ea typeface="宋体"/>
               </a:rPr>
-              <a:t>（4）结果端点（末端收益值）： </a:t>
+              <a:t>（4）结果端点（末端收益值）：</a:t>
             </a:r>
             <a:r>
               <a:rPr sz="1250" b="0">
@@ -7306,7 +7306,7 @@
                 <a:latin typeface="Times New Roman"/>
                 <a:ea typeface="宋体"/>
               </a:rPr>
-              <a:t>  2. 逆向归纳剪枝算法（例9-6 实战演算）</a:t>
+              <a:t>2. 逆向归纳剪枝算法（例9-6 实战演算）</a:t>
             </a:r>
           </a:p>
         </p:txBody>
@@ -7349,7 +7349,7 @@
                 <a:latin typeface="Times New Roman"/>
                 <a:ea typeface="宋体"/>
               </a:rPr>
-              <a:t>（1）从右向左逆向推算： </a:t>
+              <a:t>（1）从右向左逆向推算：</a:t>
             </a:r>
             <a:r>
               <a:rPr sz="1250" b="0">
@@ -7359,7 +7359,7 @@
                 <a:latin typeface="Times New Roman"/>
                 <a:ea typeface="宋体"/>
               </a:rPr>
-              <a:t>首先计算各机会节点的期望收益值 E = \sum P_i \cdot NPV_i。</a:t>
+              <a:t>首先计算各机会节点的期望收益值 E = ∑ Pᵢ · NPVᵢ。</a:t>
             </a:r>
           </a:p>
           <a:p>
@@ -7379,7 +7379,7 @@
                 <a:latin typeface="Times New Roman"/>
                 <a:ea typeface="宋体"/>
               </a:rPr>
-              <a:t>（2）在决策节点做出最优抉择： </a:t>
+              <a:t>（2）在决策节点做出最优抉择：</a:t>
             </a:r>
             <a:r>
               <a:rPr sz="1250" b="0">
@@ -7409,7 +7409,7 @@
                 <a:latin typeface="Times New Roman"/>
                 <a:ea typeface="宋体"/>
               </a:rPr>
-              <a:t>（3）对劣势方案实施剪枝（// 划线淘汰）： </a:t>
+              <a:t>（3）对劣势方案实施剪枝（// 划线淘汰）：</a:t>
             </a:r>
             <a:r>
               <a:rPr sz="1250" b="0">
@@ -7476,7 +7476,7 @@
                 <a:latin typeface="Times New Roman"/>
                 <a:ea typeface="宋体"/>
               </a:rPr>
-              <a:t>  ★ 核心要点：决策树模型将复杂的多阶段动态不确定决策化繁为简，是企业进行战略性产能扩张与研发立项的强力图解算法。</a:t>
+              <a:t>★ 核心要点：决策树模型将复杂的多阶段动态不确定决策化繁为简，是企业进行战略性产能扩张与研发立项的强力图解算法。</a:t>
             </a:r>
           </a:p>
         </p:txBody>
@@ -7883,7 +7883,7 @@
                 <a:latin typeface="Times New Roman"/>
                 <a:ea typeface="宋体"/>
               </a:rPr>
-              <a:t>  1. 敏感性分析基本工作步骤</a:t>
+              <a:t>1. 敏感性分析基本工作步骤</a:t>
             </a:r>
           </a:p>
         </p:txBody>
@@ -7926,7 +7926,7 @@
                 <a:latin typeface="Times New Roman"/>
                 <a:ea typeface="宋体"/>
               </a:rPr>
-              <a:t>（1）设定基准方案预测： </a:t>
+              <a:t>（1）设定基准方案预测：</a:t>
             </a:r>
             <a:r>
               <a:rPr sz="1250" b="0">
@@ -7936,7 +7936,7 @@
                 <a:latin typeface="Times New Roman"/>
                 <a:ea typeface="宋体"/>
               </a:rPr>
-              <a:t>在正常基准假设下计算项目的基准净现值 NPV_0。</a:t>
+              <a:t>在正常基准假设下计算项目的基准净现值 NPV₀。</a:t>
             </a:r>
           </a:p>
           <a:p>
@@ -7956,7 +7956,7 @@
                 <a:latin typeface="Times New Roman"/>
                 <a:ea typeface="宋体"/>
               </a:rPr>
-              <a:t>（2）单因素单向扰动测试： </a:t>
+              <a:t>（2）单因素单向扰动测试：</a:t>
             </a:r>
             <a:r>
               <a:rPr sz="1250" b="0">
@@ -7966,7 +7966,7 @@
                 <a:latin typeface="Times New Roman"/>
                 <a:ea typeface="宋体"/>
               </a:rPr>
-              <a:t>保持其他变量不变，分别让产品单价 P、销售量 Q、初始投资 C_0、单位变动成本 V 上浮或下滑 10%~20%。</a:t>
+              <a:t>保持其他变量不变，分别让产品单价 P、销售量 Q、初始投资 C₀、单位变动成本 V 上浮或下滑 10%~20%。</a:t>
             </a:r>
           </a:p>
           <a:p>
@@ -7986,7 +7986,7 @@
                 <a:latin typeface="Times New Roman"/>
                 <a:ea typeface="宋体"/>
               </a:rPr>
-              <a:t>（3）计算敏感度系数（Sensitivity Coefficient）： </a:t>
+              <a:t>（3）计算敏感度系数（Sensitivity Coefficient）：</a:t>
             </a:r>
             <a:r>
               <a:rPr sz="1250" b="0">
@@ -7996,7 +7996,7 @@
                 <a:latin typeface="Times New Roman"/>
                 <a:ea typeface="宋体"/>
               </a:rPr>
-              <a:t>S = \frac{\Delta NPV / NPV_0}{\Delta X / X_0}（S 绝对值越大，表明该因素越敏感、是头号监控风险源！）。</a:t>
+              <a:t>S = (Δ NPV / NPV₀) / (Δ X / X₀)（S 绝对值越大，表明该因素越敏感、是头号监控风险源！）。</a:t>
             </a:r>
           </a:p>
         </p:txBody>
@@ -8096,7 +8096,7 @@
                 <a:latin typeface="Times New Roman"/>
                 <a:ea typeface="宋体"/>
               </a:rPr>
-              <a:t>  2. 临界安全边界测算（例9-7）</a:t>
+              <a:t>2. 临界安全边界测算（例9-7）</a:t>
             </a:r>
           </a:p>
         </p:txBody>
@@ -8139,7 +8139,7 @@
                 <a:latin typeface="Times New Roman"/>
                 <a:ea typeface="宋体"/>
               </a:rPr>
-              <a:t>（1）临界值（Break-even Value）： </a:t>
+              <a:t>（1）临界值（Break-even Value）：</a:t>
             </a:r>
             <a:r>
               <a:rPr sz="1250" b="0">
@@ -8169,7 +8169,7 @@
                 <a:latin typeface="Times New Roman"/>
                 <a:ea typeface="宋体"/>
               </a:rPr>
-              <a:t>（2）管理决策价值： </a:t>
+              <a:t>（2）管理决策价值：</a:t>
             </a:r>
             <a:r>
               <a:rPr sz="1250" b="0">
@@ -8236,7 +8236,7 @@
                 <a:latin typeface="Times New Roman"/>
                 <a:ea typeface="宋体"/>
               </a:rPr>
-              <a:t>  ★ 核心要点：敏感性分析精准识别出决定项目生死成败的'阿喀琉斯之踵'，为企业编制应急风险预案提供靶向聚焦。</a:t>
+              <a:t>★ 核心要点：敏感性分析精准识别出决定项目生死成败的'阿喀琉斯之踵'，为企业编制应急风险预案提供靶向聚焦。</a:t>
             </a:r>
           </a:p>
         </p:txBody>
@@ -8950,7 +8950,7 @@
                 <a:latin typeface="Times New Roman"/>
                 <a:ea typeface="宋体"/>
               </a:rPr>
-              <a:t>  1. 最大最小收益决策法（MaxiMin / 悲观保守准则，例9-8）</a:t>
+              <a:t>1. 最大最小收益决策法（MaxiMin / 悲观保守准则，例9-8）</a:t>
             </a:r>
           </a:p>
         </p:txBody>
@@ -8993,7 +8993,7 @@
                 <a:latin typeface="Times New Roman"/>
                 <a:ea typeface="宋体"/>
               </a:rPr>
-              <a:t>（1）决策逻辑： </a:t>
+              <a:t>（1）决策逻辑：</a:t>
             </a:r>
             <a:r>
               <a:rPr sz="1250" b="0">
@@ -9023,7 +9023,7 @@
                 <a:latin typeface="Times New Roman"/>
                 <a:ea typeface="宋体"/>
               </a:rPr>
-              <a:t>（2）实施步骤： </a:t>
+              <a:t>（2）实施步骤：</a:t>
             </a:r>
             <a:r>
               <a:rPr sz="1250" b="0">
@@ -9053,7 +9053,7 @@
                 <a:latin typeface="Times New Roman"/>
                 <a:ea typeface="宋体"/>
               </a:rPr>
-              <a:t>（3）适用场景： </a:t>
+              <a:t>（3）适用场景：</a:t>
             </a:r>
             <a:r>
               <a:rPr sz="1250" b="0">
@@ -9163,7 +9163,7 @@
                 <a:latin typeface="Times New Roman"/>
                 <a:ea typeface="宋体"/>
               </a:rPr>
-              <a:t>  2. 最小最大遗憾值决策法（MiniMax Regret / 萨维奇准则，例9-9）</a:t>
+              <a:t>2. 最小最大遗憾值决策法（MiniMax Regret / 萨维奇准则，例9-9）</a:t>
             </a:r>
           </a:p>
         </p:txBody>
@@ -9206,7 +9206,7 @@
                 <a:latin typeface="Times New Roman"/>
                 <a:ea typeface="宋体"/>
               </a:rPr>
-              <a:t>（1）后悔值（遗憾值）定义： </a:t>
+              <a:t>（1）后悔值（遗憾值）定义：</a:t>
             </a:r>
             <a:r>
               <a:rPr sz="1250" b="0">
@@ -9216,7 +9216,7 @@
                 <a:latin typeface="Times New Roman"/>
                 <a:ea typeface="宋体"/>
               </a:rPr>
-              <a:t>在某种自然状态下，最优方案的收益与实际选择方案收益之间的差额（Regret = Payoff_{max} - Payoff_{actual}）。</a:t>
+              <a:t>在某种自然状态下，最优方案的收益与实际选择方案收益之间的差额（Regret = Payoff_max - Payoff_actual）。</a:t>
             </a:r>
           </a:p>
           <a:p>
@@ -9236,7 +9236,7 @@
                 <a:latin typeface="Times New Roman"/>
                 <a:ea typeface="宋体"/>
               </a:rPr>
-              <a:t>（2）实施步骤： </a:t>
+              <a:t>（2）实施步骤：</a:t>
             </a:r>
             <a:r>
               <a:rPr sz="1250" b="0">
@@ -9266,7 +9266,7 @@
                 <a:latin typeface="Times New Roman"/>
                 <a:ea typeface="宋体"/>
               </a:rPr>
-              <a:t>（3）经济学魅力： </a:t>
+              <a:t>（3）经济学魅力：</a:t>
             </a:r>
             <a:r>
               <a:rPr sz="1250" b="0">
@@ -9333,7 +9333,7 @@
                 <a:latin typeface="Times New Roman"/>
                 <a:ea typeface="宋体"/>
               </a:rPr>
-              <a:t>  ★ 核心要点：不确定性决策准则为在毫无历史概率数据的黑天鹅极端环境下做出稳健决策提供了理性工具。</a:t>
+              <a:t>★ 核心要点：不确定性决策准则为在毫无历史概率数据的黑天鹅极端环境下做出稳健决策提供了理性工具。</a:t>
             </a:r>
           </a:p>
         </p:txBody>
@@ -9740,7 +9740,7 @@
                 <a:latin typeface="Times New Roman"/>
                 <a:ea typeface="宋体"/>
               </a:rPr>
-              <a:t>  1. 完全信息价值（EVPI）的经济学定义</a:t>
+              <a:t>1. 完全信息价值（EVPI）的经济学定义</a:t>
             </a:r>
           </a:p>
         </p:txBody>
@@ -9783,7 +9783,7 @@
                 <a:latin typeface="Times New Roman"/>
                 <a:ea typeface="宋体"/>
               </a:rPr>
-              <a:t>（1）概念界定： </a:t>
+              <a:t>（1）概念界定：</a:t>
             </a:r>
             <a:r>
               <a:rPr sz="1250" b="0">
@@ -9813,7 +9813,7 @@
                 <a:latin typeface="Times New Roman"/>
                 <a:ea typeface="宋体"/>
               </a:rPr>
-              <a:t>（2）计算公式： </a:t>
+              <a:t>（2）计算公式：</a:t>
             </a:r>
             <a:r>
               <a:rPr sz="1250" b="0">
@@ -9823,7 +9823,7 @@
                 <a:latin typeface="Times New Roman"/>
                 <a:ea typeface="宋体"/>
               </a:rPr>
-              <a:t>EVPI = \text{完全信息下的期望收益 (EPPI)} - \text{无信息时的最大期望收益 (EMV_{max})}</a:t>
+              <a:t>EVPI = 完全信息下的期望收益 (EPPI) - 无信息时的最大期望收益 (EMV_max)</a:t>
             </a:r>
           </a:p>
           <a:p>
@@ -9843,7 +9843,7 @@
                 <a:latin typeface="Times New Roman"/>
                 <a:ea typeface="宋体"/>
               </a:rPr>
-              <a:t>（3）完全信息期望收益 (EPPI)： </a:t>
+              <a:t>（3）完全信息期望收益 (EPPI)：</a:t>
             </a:r>
             <a:r>
               <a:rPr sz="1250" b="0">
@@ -9853,7 +9853,7 @@
                 <a:latin typeface="Times New Roman"/>
                 <a:ea typeface="宋体"/>
               </a:rPr>
-              <a:t>EPPI = \sum P_i \times (\text{该状态下的最大可能收益})</a:t>
+              <a:t>EPPI = ∑ Pᵢ × (该状态下的最大可能收益)</a:t>
             </a:r>
           </a:p>
         </p:txBody>
@@ -9953,7 +9953,7 @@
                 <a:latin typeface="Times New Roman"/>
                 <a:ea typeface="宋体"/>
               </a:rPr>
-              <a:t>  2. 企业商业实务应用（市场调研最高出价边界）</a:t>
+              <a:t>2. 企业商业实务应用（市场调研最高出价边界）</a:t>
             </a:r>
           </a:p>
         </p:txBody>
@@ -9996,7 +9996,7 @@
                 <a:latin typeface="Times New Roman"/>
                 <a:ea typeface="宋体"/>
               </a:rPr>
-              <a:t>（1）调研费用预算天花板： </a:t>
+              <a:t>（1）调研费用预算天花板：</a:t>
             </a:r>
             <a:r>
               <a:rPr sz="1250" b="0">
@@ -10026,7 +10026,7 @@
                 <a:latin typeface="Times New Roman"/>
                 <a:ea typeface="宋体"/>
               </a:rPr>
-              <a:t>（2）信息搜集的边际成本与边际价值平衡： </a:t>
+              <a:t>（2）信息搜集的边际成本与边际价值平衡：</a:t>
             </a:r>
             <a:r>
               <a:rPr sz="1250" b="0">
@@ -10093,7 +10093,7 @@
                 <a:latin typeface="Times New Roman"/>
                 <a:ea typeface="宋体"/>
               </a:rPr>
-              <a:t>  ★ 核心要点：信息具有实实在在的经济价值，EVPI 为企业商业情报与大数据采购设立了严谨的资本预算底线。</a:t>
+              <a:t>★ 核心要点：信息具有实实在在的经济价值，EVPI 为企业商业情报与大数据采购设立了严谨的资本预算底线。</a:t>
             </a:r>
           </a:p>
         </p:txBody>
@@ -12095,7 +12095,7 @@
                 <a:latin typeface="Times New Roman"/>
                 <a:ea typeface="宋体"/>
               </a:rPr>
-              <a:t>  1. 蒙特卡洛计算机模拟基本原理</a:t>
+              <a:t>1. 蒙特卡洛计算机模拟基本原理</a:t>
             </a:r>
           </a:p>
         </p:txBody>
@@ -12138,7 +12138,7 @@
                 <a:latin typeface="Times New Roman"/>
                 <a:ea typeface="宋体"/>
               </a:rPr>
-              <a:t>（1）破除静态单点假定： </a:t>
+              <a:t>（1）破除静态单点假定：</a:t>
             </a:r>
             <a:r>
               <a:rPr sz="1250" b="0">
@@ -12168,7 +12168,7 @@
                 <a:latin typeface="Times New Roman"/>
                 <a:ea typeface="宋体"/>
               </a:rPr>
-              <a:t>（2）计算机随机抽样迭代： </a:t>
+              <a:t>（2）计算机随机抽样迭代：</a:t>
             </a:r>
             <a:r>
               <a:rPr sz="1250" b="0">
@@ -12198,7 +12198,7 @@
                 <a:latin typeface="Times New Roman"/>
                 <a:ea typeface="宋体"/>
               </a:rPr>
-              <a:t>（3）输出全息风险概率分布图： </a:t>
+              <a:t>（3）输出全息风险概率分布图：</a:t>
             </a:r>
             <a:r>
               <a:rPr sz="1250" b="0">
@@ -12308,7 +12308,7 @@
                 <a:latin typeface="Times New Roman"/>
                 <a:ea typeface="宋体"/>
               </a:rPr>
-              <a:t>  2. 蒙特卡洛模拟对重大企业战略投资的价值</a:t>
+              <a:t>2. 蒙特卡洛模拟对重大企业战略投资的价值</a:t>
             </a:r>
           </a:p>
         </p:txBody>
@@ -12351,7 +12351,7 @@
                 <a:latin typeface="Times New Roman"/>
                 <a:ea typeface="宋体"/>
               </a:rPr>
-              <a:t>（1）量化极端尾部风险（Tail Risk）： </a:t>
+              <a:t>（1）量化极端尾部风险（Tail Risk）：</a:t>
             </a:r>
             <a:r>
               <a:rPr sz="1250" b="0">
@@ -12381,7 +12381,7 @@
                 <a:latin typeface="Times New Roman"/>
                 <a:ea typeface="宋体"/>
               </a:rPr>
-              <a:t>（2）助力高管战略拍板： </a:t>
+              <a:t>（2）助力高管战略拍板：</a:t>
             </a:r>
             <a:r>
               <a:rPr sz="1250" b="0">
@@ -12448,7 +12448,7 @@
                 <a:latin typeface="Times New Roman"/>
                 <a:ea typeface="宋体"/>
               </a:rPr>
-              <a:t>  ★ 核心要点：蒙特卡洛模拟将大数据算力引入风险管理，是现代跨国集团与投行评估超级项目的最高标配。</a:t>
+              <a:t>★ 核心要点：蒙特卡洛模拟将大数据算力引入风险管理，是现代跨国集团与投行评估超级项目的最高标配。</a:t>
             </a:r>
           </a:p>
         </p:txBody>
@@ -12855,7 +12855,7 @@
                 <a:latin typeface="Times New Roman"/>
                 <a:ea typeface="宋体"/>
               </a:rPr>
-              <a:t>  风险测度与离散系数</a:t>
+              <a:t>风险测度与离散系数</a:t>
             </a:r>
           </a:p>
         </p:txBody>
@@ -13059,7 +13059,7 @@
                 <a:latin typeface="Times New Roman"/>
                 <a:ea typeface="宋体"/>
               </a:rPr>
-              <a:t>  风险偏好与效用函数</a:t>
+              <a:t>风险偏好与效用函数</a:t>
             </a:r>
           </a:p>
         </p:txBody>
@@ -13263,7 +13263,7 @@
                 <a:latin typeface="Times New Roman"/>
                 <a:ea typeface="宋体"/>
               </a:rPr>
-              <a:t>  降低风险五大途径</a:t>
+              <a:t>降低风险五大途径</a:t>
             </a:r>
           </a:p>
         </p:txBody>
@@ -13467,7 +13467,7 @@
                 <a:latin typeface="Times New Roman"/>
                 <a:ea typeface="宋体"/>
               </a:rPr>
-              <a:t>  决策树与不确定准则</a:t>
+              <a:t>决策树与不确定准则</a:t>
             </a:r>
           </a:p>
         </p:txBody>
@@ -13628,7 +13628,7 @@
                 <a:latin typeface="Times New Roman"/>
                 <a:ea typeface="宋体"/>
               </a:rPr>
-              <a:t>  ★ 战略结语：风险是商业世界的客观伴生品，卓越的管理不是盲目规避风险，而是精准测度风险、智慧对冲风险并享受风险承担带来的超额溢价。</a:t>
+              <a:t>★ 战略结语：风险是商业世界的客观伴生品，卓越的管理不是盲目规避风险，而是精准测度风险、智慧对冲风险并享受风险承担带来的超额溢价。</a:t>
             </a:r>
           </a:p>
         </p:txBody>
@@ -14035,7 +14035,7 @@
                 <a:latin typeface="Times New Roman"/>
                 <a:ea typeface="宋体"/>
               </a:rPr>
-              <a:t>  课后复习思考题与 MBA 讨论案例（严格对应课本习题）</a:t>
+              <a:t>课后复习思考题与 MBA 讨论案例（严格对应课本习题）</a:t>
             </a:r>
           </a:p>
         </p:txBody>
@@ -14078,7 +14078,7 @@
                 <a:latin typeface="Times New Roman"/>
                 <a:ea typeface="宋体"/>
               </a:rPr>
-              <a:t>1. </a:t>
+              <a:t>1.</a:t>
             </a:r>
             <a:r>
               <a:rPr sz="1150" b="0">
@@ -14108,7 +14108,7 @@
                 <a:latin typeface="Times New Roman"/>
                 <a:ea typeface="宋体"/>
               </a:rPr>
-              <a:t>2. </a:t>
+              <a:t>2.</a:t>
             </a:r>
             <a:r>
               <a:rPr sz="1150" b="0">
@@ -14138,7 +14138,7 @@
                 <a:latin typeface="Times New Roman"/>
                 <a:ea typeface="宋体"/>
               </a:rPr>
-              <a:t>3. </a:t>
+              <a:t>3.</a:t>
             </a:r>
             <a:r>
               <a:rPr sz="1150" b="0">
@@ -14168,7 +14168,7 @@
                 <a:latin typeface="Times New Roman"/>
                 <a:ea typeface="宋体"/>
               </a:rPr>
-              <a:t>4. </a:t>
+              <a:t>4.</a:t>
             </a:r>
             <a:r>
               <a:rPr sz="1150" b="0">
@@ -14198,7 +14198,7 @@
                 <a:latin typeface="Times New Roman"/>
                 <a:ea typeface="宋体"/>
               </a:rPr>
-              <a:t>5. </a:t>
+              <a:t>5.</a:t>
             </a:r>
             <a:r>
               <a:rPr sz="1150" b="0">
@@ -14228,7 +14228,7 @@
                 <a:latin typeface="Times New Roman"/>
                 <a:ea typeface="宋体"/>
               </a:rPr>
-              <a:t>6. </a:t>
+              <a:t>6.</a:t>
             </a:r>
             <a:r>
               <a:rPr sz="1150" b="0">
@@ -14258,7 +14258,7 @@
                 <a:latin typeface="Times New Roman"/>
                 <a:ea typeface="宋体"/>
               </a:rPr>
-              <a:t>7. </a:t>
+              <a:t>7.</a:t>
             </a:r>
             <a:r>
               <a:rPr sz="1150" b="0">
@@ -14982,7 +14982,7 @@
                 <a:latin typeface="Times New Roman"/>
                 <a:ea typeface="宋体"/>
               </a:rPr>
-              <a:t>  1. 决策环境的三重分类界定</a:t>
+              <a:t>1. 决策环境的三重分类界定</a:t>
             </a:r>
           </a:p>
         </p:txBody>
@@ -15025,7 +15025,7 @@
                 <a:latin typeface="Times New Roman"/>
                 <a:ea typeface="宋体"/>
               </a:rPr>
-              <a:t>（1）确定性条件（Certainty）： </a:t>
+              <a:t>（1）确定性条件（Certainty）：</a:t>
             </a:r>
             <a:r>
               <a:rPr sz="1250" b="0">
@@ -15055,7 +15055,7 @@
                 <a:latin typeface="Times New Roman"/>
                 <a:ea typeface="宋体"/>
               </a:rPr>
-              <a:t>（2）风险条件（Risk）： </a:t>
+              <a:t>（2）风险条件（Risk）：</a:t>
             </a:r>
             <a:r>
               <a:rPr sz="1250" b="0">
@@ -15065,7 +15065,7 @@
                 <a:latin typeface="Times New Roman"/>
                 <a:ea typeface="宋体"/>
               </a:rPr>
-              <a:t>未来可能出现多种自然状态，且每种自然状态发生的客观概率 P_i 是已知的或可通过大数定律精确估计的。</a:t>
+              <a:t>未来可能出现多种自然状态，且每种自然状态发生的客观概率 Pᵢ 是已知的或可通过大数定律精确估计的。</a:t>
             </a:r>
           </a:p>
           <a:p>
@@ -15085,7 +15085,7 @@
                 <a:latin typeface="Times New Roman"/>
                 <a:ea typeface="宋体"/>
               </a:rPr>
-              <a:t>（3）不确定性条件（Uncertainty）： </a:t>
+              <a:t>（3）不确定性条件（Uncertainty）：</a:t>
             </a:r>
             <a:r>
               <a:rPr sz="1250" b="0">
@@ -15195,7 +15195,7 @@
                 <a:latin typeface="Times New Roman"/>
                 <a:ea typeface="宋体"/>
               </a:rPr>
-              <a:t>  2. 概率分布（Probability Distribution）的统计属性</a:t>
+              <a:t>2. 概率分布（Probability Distribution）的统计属性</a:t>
             </a:r>
           </a:p>
         </p:txBody>
@@ -15238,7 +15238,7 @@
                 <a:latin typeface="Times New Roman"/>
                 <a:ea typeface="宋体"/>
               </a:rPr>
-              <a:t>（1）非负性公理： </a:t>
+              <a:t>（1）非负性公理：</a:t>
             </a:r>
             <a:r>
               <a:rPr sz="1250" b="0">
@@ -15248,7 +15248,7 @@
                 <a:latin typeface="Times New Roman"/>
                 <a:ea typeface="宋体"/>
               </a:rPr>
-              <a:t>每一个自然状态发生的概率满足 0 \le P_i \le 1。</a:t>
+              <a:t>每一个自然状态发生的概率满足 0 ≤ Pᵢ ≤ 1。</a:t>
             </a:r>
           </a:p>
           <a:p>
@@ -15268,7 +15268,7 @@
                 <a:latin typeface="Times New Roman"/>
                 <a:ea typeface="宋体"/>
               </a:rPr>
-              <a:t>（2）完备性公理： </a:t>
+              <a:t>（2）完备性公理：</a:t>
             </a:r>
             <a:r>
               <a:rPr sz="1250" b="0">
@@ -15278,7 +15278,7 @@
                 <a:latin typeface="Times New Roman"/>
                 <a:ea typeface="宋体"/>
               </a:rPr>
-              <a:t>所有互斥且穷尽的可能自然状态概率之和严格等于 1，即 \sum_{i=1}^n P_i = 1.0。</a:t>
+              <a:t>所有互斥且穷尽的可能自然状态概率之和严格等于 1，即 ∑ⁿ Pᵢ = 1.0。</a:t>
             </a:r>
           </a:p>
         </p:txBody>
@@ -15335,7 +15335,7 @@
                 <a:latin typeface="Times New Roman"/>
                 <a:ea typeface="宋体"/>
               </a:rPr>
-              <a:t>  ★ 核心要点：将未知的不确定性转化为已知概率的风险分布，是科学决策分析的核心起点。</a:t>
+              <a:t>★ 核心要点：将未知的不确定性转化为已知概率的风险分布，是科学决策分析的核心起点。</a:t>
             </a:r>
           </a:p>
         </p:txBody>
@@ -15742,7 +15742,7 @@
                 <a:latin typeface="Times New Roman"/>
                 <a:ea typeface="宋体"/>
               </a:rPr>
-              <a:t>  1. 期望值、方差与标准差的计算公式</a:t>
+              <a:t>1. 期望值、方差与标准差的计算公式</a:t>
             </a:r>
           </a:p>
         </p:txBody>
@@ -15785,7 +15785,7 @@
                 <a:latin typeface="Times New Roman"/>
                 <a:ea typeface="宋体"/>
               </a:rPr>
-              <a:t>（1）期望收益值（Expected Value）： </a:t>
+              <a:t>（1）期望收益值（Expected Value）：</a:t>
             </a:r>
             <a:r>
               <a:rPr sz="1250" b="0">
@@ -15795,7 +15795,7 @@
                 <a:latin typeface="Times New Roman"/>
                 <a:ea typeface="宋体"/>
               </a:rPr>
-              <a:t>E(X) = \sum_{i=1}^n P_i X_i \quad (加权平均预期收益水平)</a:t>
+              <a:t>E(X) = ∑ⁿ Pᵢ Xᵢ (加权平均预期收益水平)</a:t>
             </a:r>
           </a:p>
           <a:p>
@@ -15815,7 +15815,7 @@
                 <a:latin typeface="Times New Roman"/>
                 <a:ea typeface="宋体"/>
               </a:rPr>
-              <a:t>（2）方差（Variance）： </a:t>
+              <a:t>（2）方差（Variance）：</a:t>
             </a:r>
             <a:r>
               <a:rPr sz="1250" b="0">
@@ -15825,7 +15825,7 @@
                 <a:latin typeface="Times New Roman"/>
                 <a:ea typeface="宋体"/>
               </a:rPr>
-              <a:t>\sigma^2 = \sum_{i=1}^n P_i [X_i - E(X)]^2 \quad (衡量实际收益偏离期望值的离散程度)</a:t>
+              <a:t>σ² = ∑ⁿ Pᵢ [Xᵢ - E(X)]² (衡量实际收益偏离期望值的离散程度)</a:t>
             </a:r>
           </a:p>
           <a:p>
@@ -15845,7 +15845,7 @@
                 <a:latin typeface="Times New Roman"/>
                 <a:ea typeface="宋体"/>
               </a:rPr>
-              <a:t>（3）标准差（Standard Deviation）： </a:t>
+              <a:t>（3）标准差（Standard Deviation）：</a:t>
             </a:r>
             <a:r>
               <a:rPr sz="1250" b="0">
@@ -15855,7 +15855,7 @@
                 <a:latin typeface="Times New Roman"/>
                 <a:ea typeface="宋体"/>
               </a:rPr>
-              <a:t>\sigma = \sqrt{\sigma^2} \quad (测度项目收益的绝对波动风险范围)</a:t>
+              <a:t>σ = √(σ²) (测度项目收益的绝对波动风险范围)</a:t>
             </a:r>
           </a:p>
         </p:txBody>
@@ -15955,7 +15955,7 @@
                 <a:latin typeface="Times New Roman"/>
                 <a:ea typeface="宋体"/>
               </a:rPr>
-              <a:t>  2. 离散系数（CV）与跨项目风险比对（例9-1/9-2）</a:t>
+              <a:t>2. 离散系数（CV）与跨项目风险比对（例9-1/9-2）</a:t>
             </a:r>
           </a:p>
         </p:txBody>
@@ -15998,7 +15998,7 @@
                 <a:latin typeface="Times New Roman"/>
                 <a:ea typeface="宋体"/>
               </a:rPr>
-              <a:t>（1）离散系数公式： </a:t>
+              <a:t>（1）离散系数公式：</a:t>
             </a:r>
             <a:r>
               <a:rPr sz="1250" b="0">
@@ -16008,7 +16008,7 @@
                 <a:latin typeface="Times New Roman"/>
                 <a:ea typeface="宋体"/>
               </a:rPr>
-              <a:t>CV = \frac{\sigma}{E(X)} \quad (测度每单位期望收益所承担的相对风险大小！)</a:t>
+              <a:t>CV = (σ) / (E(X)) (测度每单位期望收益所承担的相对风险大小！)</a:t>
             </a:r>
           </a:p>
           <a:p>
@@ -16028,7 +16028,7 @@
                 <a:latin typeface="Times New Roman"/>
                 <a:ea typeface="宋体"/>
               </a:rPr>
-              <a:t>（2）标准差失效场景： </a:t>
+              <a:t>（2）标准差失效场景：</a:t>
             </a:r>
             <a:r>
               <a:rPr sz="1250" b="0">
@@ -16058,7 +16058,7 @@
                 <a:latin typeface="Times New Roman"/>
                 <a:ea typeface="宋体"/>
               </a:rPr>
-              <a:t>（3）决策结论： </a:t>
+              <a:t>（3）决策结论：</a:t>
             </a:r>
             <a:r>
               <a:rPr sz="1250" b="0">
@@ -16125,7 +16125,7 @@
                 <a:latin typeface="Times New Roman"/>
                 <a:ea typeface="宋体"/>
               </a:rPr>
-              <a:t>  ★ 核心要点：离散系数 CV 克服了标准差在期望收益不同项目间无法直接比对的缺陷，是评估相对风险的最佳指标。</a:t>
+              <a:t>★ 核心要点：离散系数 CV 克服了标准差在期望收益不同项目间无法直接比对的缺陷，是评估相对风险的最佳指标。</a:t>
             </a:r>
           </a:p>
         </p:txBody>
@@ -16863,7 +16863,7 @@
                 <a:latin typeface="Times New Roman"/>
                 <a:ea typeface="宋体"/>
               </a:rPr>
-              <a:t>  财富效用曲线形态与风险偏好分类</a:t>
+              <a:t>财富效用曲线形态与风险偏好分类</a:t>
             </a:r>
           </a:p>
         </p:txBody>
@@ -16906,7 +16906,7 @@
                 <a:latin typeface="Times New Roman"/>
                 <a:ea typeface="宋体"/>
               </a:rPr>
-              <a:t>（1）风险厌恶型（Risk Averse / 多数理性人）： </a:t>
+              <a:t>（1）风险厌恶型（Risk Averse / 多数理性人）：</a:t>
             </a:r>
             <a:r>
               <a:rPr sz="1200" b="0">
@@ -16936,7 +16936,7 @@
                 <a:latin typeface="Times New Roman"/>
                 <a:ea typeface="宋体"/>
               </a:rPr>
-              <a:t>（2）风险中性型（Risk Neutral）： </a:t>
+              <a:t>（2）风险中性型（Risk Neutral）：</a:t>
             </a:r>
             <a:r>
               <a:rPr sz="1200" b="0">
@@ -16966,7 +16966,7 @@
                 <a:latin typeface="Times New Roman"/>
                 <a:ea typeface="宋体"/>
               </a:rPr>
-              <a:t>（3）风险爱好型（Risk Loving）： </a:t>
+              <a:t>（3）风险爱好型（Risk Loving）：</a:t>
             </a:r>
             <a:r>
               <a:rPr sz="1200" b="0">
@@ -16996,7 +16996,7 @@
                 <a:latin typeface="Times New Roman"/>
                 <a:ea typeface="宋体"/>
               </a:rPr>
-              <a:t>（4）案例9-1 启示： </a:t>
+              <a:t>（4）案例9-1 启示：</a:t>
             </a:r>
             <a:r>
               <a:rPr sz="1200" b="0">
@@ -17063,7 +17063,7 @@
                 <a:latin typeface="Times New Roman"/>
                 <a:ea typeface="宋体"/>
               </a:rPr>
-              <a:t>  ★ 理论精要：边际效用递减是解释理性投资者要求风险溢价补偿与商业保险存在的微观心理基石。</a:t>
+              <a:t>★ 理论精要：边际效用递减是解释理性投资者要求风险溢价补偿与商业保险存在的微观心理基石。</a:t>
             </a:r>
           </a:p>
         </p:txBody>
@@ -17470,7 +17470,7 @@
                 <a:latin typeface="Times New Roman"/>
                 <a:ea typeface="宋体"/>
               </a:rPr>
-              <a:t>  1. 违法犯罪的期望效用模型（贝克尔犯罪经济学）</a:t>
+              <a:t>1. 违法犯罪的期望效用模型（贝克尔犯罪经济学）</a:t>
             </a:r>
           </a:p>
         </p:txBody>
@@ -17513,7 +17513,7 @@
                 <a:latin typeface="Times New Roman"/>
                 <a:ea typeface="宋体"/>
               </a:rPr>
-              <a:t>（1）违法者的期望收益模型： </a:t>
+              <a:t>（1）违法者的期望收益模型：</a:t>
             </a:r>
             <a:r>
               <a:rPr sz="1250" b="0">
@@ -17523,7 +17523,7 @@
                 <a:latin typeface="Times New Roman"/>
                 <a:ea typeface="宋体"/>
               </a:rPr>
-              <a:t>E[U] = (1 - P) \cdot U(W + G) + P \cdot U(W - F)</a:t>
+              <a:t>E[U] = (1 - P) · U(W + G) + P · U(W - F)</a:t>
             </a:r>
           </a:p>
           <a:p>
@@ -17543,7 +17543,7 @@
                 <a:latin typeface="Times New Roman"/>
                 <a:ea typeface="宋体"/>
               </a:rPr>
-              <a:t>（2）参数解析： </a:t>
+              <a:t>（2）参数解析：</a:t>
             </a:r>
             <a:r>
               <a:rPr sz="1250" b="0">
@@ -17573,7 +17573,7 @@
                 <a:latin typeface="Times New Roman"/>
                 <a:ea typeface="宋体"/>
               </a:rPr>
-              <a:t>（3）理性人犯罪条件： </a:t>
+              <a:t>（3）理性人犯罪条件：</a:t>
             </a:r>
             <a:r>
               <a:rPr sz="1250" b="0">
@@ -17683,7 +17683,7 @@
                 <a:latin typeface="Times New Roman"/>
                 <a:ea typeface="宋体"/>
               </a:rPr>
-              <a:t>  2. 提高破案概率 (P) vs 加重惩罚力度 (F) 的威慑权衡</a:t>
+              <a:t>2. 提高破案概率 (P) vs 加重惩罚力度 (F) 的威慑权衡</a:t>
             </a:r>
           </a:p>
         </p:txBody>
@@ -17726,7 +17726,7 @@
                 <a:latin typeface="Times New Roman"/>
                 <a:ea typeface="宋体"/>
               </a:rPr>
-              <a:t>（1）针对风险厌恶型犯罪者： </a:t>
+              <a:t>（1）针对风险厌恶型犯罪者：</a:t>
             </a:r>
             <a:r>
               <a:rPr sz="1250" b="0">
@@ -17756,7 +17756,7 @@
                 <a:latin typeface="Times New Roman"/>
                 <a:ea typeface="宋体"/>
               </a:rPr>
-              <a:t>（2）针对风险爱好型犯罪者（亡命徒）： </a:t>
+              <a:t>（2）针对风险爱好型犯罪者（亡命徒）：</a:t>
             </a:r>
             <a:r>
               <a:rPr sz="1250" b="0">
@@ -17786,7 +17786,7 @@
                 <a:latin typeface="Times New Roman"/>
                 <a:ea typeface="宋体"/>
               </a:rPr>
-              <a:t>（3）政策建议： </a:t>
+              <a:t>（3）政策建议：</a:t>
             </a:r>
             <a:r>
               <a:rPr sz="1250" b="0">
@@ -17853,7 +17853,7 @@
                 <a:latin typeface="Times New Roman"/>
                 <a:ea typeface="宋体"/>
               </a:rPr>
-              <a:t>  ★ 核心要点：法律与合规监管的威慑本质是通过改变潜在违法者的概率分布与收益惩罚结构，引导其理性选择守法。</a:t>
+              <a:t>★ 核心要点：法律与合规监管的威慑本质是通过改变潜在违法者的概率分布与收益惩罚结构，引导其理性选择守法。</a:t>
             </a:r>
           </a:p>
         </p:txBody>
@@ -18260,7 +18260,7 @@
                 <a:latin typeface="Times New Roman"/>
                 <a:ea typeface="宋体"/>
               </a:rPr>
-              <a:t>  1. 圣彼得堡悖论（St. Petersburg Paradox）</a:t>
+              <a:t>1. 圣彼得堡悖论（St. Petersburg Paradox）</a:t>
             </a:r>
           </a:p>
         </p:txBody>
@@ -18303,7 +18303,7 @@
                 <a:latin typeface="Times New Roman"/>
                 <a:ea typeface="宋体"/>
               </a:rPr>
-              <a:t>（1）无限期望收益赌局： </a:t>
+              <a:t>（1）无限期望收益赌局：</a:t>
             </a:r>
             <a:r>
               <a:rPr sz="1250" b="0">
@@ -18313,7 +18313,7 @@
                 <a:latin typeface="Times New Roman"/>
                 <a:ea typeface="宋体"/>
               </a:rPr>
-              <a:t>掷硬币连续出现正面第 n 次获得 2^n 元，期望货币收益 E(X) = \sum (1/2)^n \cdot 2^n = \infty（无穷大！）。</a:t>
+              <a:t>掷硬币连续出现正面第 n 次获得 2ⁿ 元，期望货币收益 E(X) = ∑ (1/2)ⁿ · 2ⁿ = ∞ （无穷大！）。</a:t>
             </a:r>
           </a:p>
           <a:p>
@@ -18333,7 +18333,7 @@
                 <a:latin typeface="Times New Roman"/>
                 <a:ea typeface="宋体"/>
               </a:rPr>
-              <a:t>（2）现实行为悖论： </a:t>
+              <a:t>（2）现实行为悖论：</a:t>
             </a:r>
             <a:r>
               <a:rPr sz="1250" b="0">
@@ -18363,7 +18363,7 @@
                 <a:latin typeface="Times New Roman"/>
                 <a:ea typeface="宋体"/>
               </a:rPr>
-              <a:t>（3）伯努利破解： </a:t>
+              <a:t>（3）伯努利破解：</a:t>
             </a:r>
             <a:r>
               <a:rPr sz="1250" b="0">
@@ -18373,7 +18373,7 @@
                 <a:latin typeface="Times New Roman"/>
                 <a:ea typeface="宋体"/>
               </a:rPr>
-              <a:t>引入对数效用函数 U(W) = \ln W，边际效用递减使期望效用收敛为有限值。</a:t>
+              <a:t>引入对数效用函数 U(W) = ln W，边际效用递减使期望效用收敛为有限值。</a:t>
             </a:r>
           </a:p>
         </p:txBody>
@@ -18473,7 +18473,7 @@
                 <a:latin typeface="Times New Roman"/>
                 <a:ea typeface="宋体"/>
               </a:rPr>
-              <a:t>  2. 风险溢价（Risk Premium, RP）与确定性等价值（CE）</a:t>
+              <a:t>2. 风险溢价（Risk Premium, RP）与确定性等价值（CE）</a:t>
             </a:r>
           </a:p>
         </p:txBody>
@@ -18516,7 +18516,7 @@
                 <a:latin typeface="Times New Roman"/>
                 <a:ea typeface="宋体"/>
               </a:rPr>
-              <a:t>（1）确定性等价值 (CE)： </a:t>
+              <a:t>（1）确定性等价值 (CE)：</a:t>
             </a:r>
             <a:r>
               <a:rPr sz="1250" b="0">
@@ -18546,7 +18546,7 @@
                 <a:latin typeface="Times New Roman"/>
                 <a:ea typeface="宋体"/>
               </a:rPr>
-              <a:t>（2）风险溢价公式： </a:t>
+              <a:t>（2）风险溢价公式：</a:t>
             </a:r>
             <a:r>
               <a:rPr sz="1250" b="0">
@@ -18556,7 +18556,7 @@
                 <a:latin typeface="Times New Roman"/>
                 <a:ea typeface="宋体"/>
               </a:rPr>
-              <a:t>RP = E(W) - CE \quad (风险厌恶者为了消除不确定性所自愿放弃的期望财富差额，正是商业保险费的定价上限！)</a:t>
+              <a:t>RP = E(W) - CE (风险厌恶者为了消除不确定性所自愿放弃的期望财富差额，正是商业保险费的定价上限！)</a:t>
             </a:r>
           </a:p>
         </p:txBody>
@@ -18613,7 +18613,7 @@
                 <a:latin typeface="Times New Roman"/>
                 <a:ea typeface="宋体"/>
               </a:rPr>
-              <a:t>  ★ 核心要点：风险溢价量化了风险厌恶者的避险心理成本，是现代保险精算与资产定价的微观理论内核。</a:t>
+              <a:t>★ 核心要点：风险溢价量化了风险厌恶者的避险心理成本，是现代保险精算与资产定价的微观理论内核。</a:t>
             </a:r>
           </a:p>
         </p:txBody>
